--- a/eum_package/이음_발표자료_v3.pptx
+++ b/eum_package/이음_발표자료_v3.pptx
@@ -155,7 +155,7 @@
     </p:spTree>
     <p:extLst>
       <p:ext uri="{BB962C8B-B14F-4D97-AF65-F5344CB8AC3E}">
-        <p14:creationId xmlns:p14="http://schemas.microsoft.com/office/powerpoint/2010/main" val="2948408955"/>
+        <p14:creationId xmlns:p14="http://schemas.microsoft.com/office/powerpoint/2010/main" val="1556677232"/>
       </p:ext>
     </p:extLst>
   </p:cSld>
@@ -3848,7 +3848,7 @@
         </p:nvGraphicFramePr>
         <p:xfrm>
           <a:off x="411480" y="2084832"/>
-          <a:ext cx="11375136" cy="3840480"/>
+          <a:ext cx="11375136" cy="914400"/>
         </p:xfrm>
         <a:graphic>
           <a:graphicData uri="http://schemas.openxmlformats.org/drawingml/2006/table">
@@ -18554,13 +18554,55 @@
       </p:sp>
       <p:sp>
         <p:nvSpPr>
+          <p:cNvPr id="9" name="Text 7"/>
+          <p:cNvSpPr/>
+          <p:nvPr/>
+        </p:nvSpPr>
+        <p:spPr>
+          <a:xfrm>
+            <a:off x="429768" y="1481328"/>
+            <a:ext cx="11247120" cy="502920"/>
+          </a:xfrm>
+          <a:prstGeom prst="rect">
+            <a:avLst/>
+          </a:prstGeom>
+          <a:noFill/>
+          <a:ln/>
+        </p:spPr>
+        <p:txBody>
+          <a:bodyPr wrap="square" rtlCol="0" anchor="ctr"/>
+          <a:lstStyle/>
+          <a:p>
+            <a:pPr marL="0" indent="0">
+              <a:lnSpc>
+                <a:spcPct val="125000"/>
+              </a:lnSpc>
+              <a:buNone/>
+            </a:pPr>
+            <a:r>
+              <a:rPr lang="en-US" sz="1250" dirty="0">
+                <a:solidFill>
+                  <a:srgbClr val="888888"/>
+                </a:solidFill>
+                <a:latin typeface="Malgun Gothic" pitchFamily="34" charset="0"/>
+                <a:ea typeface="Malgun Gothic" pitchFamily="34" charset="-122"/>
+                <a:cs typeface="Malgun Gothic" pitchFamily="34" charset="-120"/>
+              </a:rPr>
+              <a:t>경남 인구감소지역 상권 정책의 오랜 전제 — “사람이 없으니 상권이 죽는다” — 는 현실의 절반만 설명한다.</a:t>
+            </a:r>
+            <a:endParaRPr lang="en-US" sz="1250" dirty="0"/>
+          </a:p>
+        </p:txBody>
+      </p:sp>
+      <p:sp>
+        <p:nvSpPr>
           <p:cNvPr id="10" name="Text 8"/>
           <p:cNvSpPr/>
           <p:nvPr/>
         </p:nvSpPr>
         <p:spPr>
           <a:xfrm>
-            <a:off x="822960" y="1915668"/>
+            <a:off x="822960" y="2331720"/>
             <a:ext cx="10515600" cy="1371600"/>
           </a:xfrm>
           <a:prstGeom prst="rect">
@@ -20004,7 +20046,7 @@
         </p:nvGraphicFramePr>
         <p:xfrm>
           <a:off x="411480" y="2148840"/>
-          <a:ext cx="11375136" cy="3291840"/>
+          <a:ext cx="11375136" cy="914400"/>
         </p:xfrm>
         <a:graphic>
           <a:graphicData uri="http://schemas.openxmlformats.org/drawingml/2006/table">
@@ -21794,7 +21836,7 @@
         </p:blipFill>
         <p:spPr>
           <a:xfrm>
-            <a:off x="2543556" y="3108960"/>
+            <a:off x="2542032" y="3108960"/>
             <a:ext cx="7104888" cy="2871216"/>
           </a:xfrm>
           <a:prstGeom prst="rect">
@@ -22743,7 +22785,7 @@
                 <a:ea typeface="Malgun Gothic" pitchFamily="34" charset="-122"/>
                 <a:cs typeface="Malgun Gothic" pitchFamily="34" charset="-120"/>
               </a:rPr>
-              <a:t>Log( 연간매출 / 연평균 생활인구 ) − 13곳 평균</a:t>
+              <a:t>ln( 연간매출 / 연평균 생활인구 ) − 13곳 평균</a:t>
             </a:r>
             <a:endParaRPr lang="en-US" sz="1700" dirty="0"/>
           </a:p>
@@ -22914,7 +22956,7 @@
                 <a:ea typeface="Malgun Gothic" pitchFamily="34" charset="-122"/>
                 <a:cs typeface="Malgun Gothic" pitchFamily="34" charset="-120"/>
               </a:rPr>
-              <a:t>음수 = 방문 대비 소비 부진(소비전환 취약) — 13곳 상대 비교 지표</a:t>
+              <a:t>직관 환산: e^MI = 평균적 지역 대비 배율 — 합천(−1.016)은 평균의 1/3, 통영(+1.015)은 2.8배</a:t>
             </a:r>
             <a:endParaRPr lang="en-US" sz="1350" dirty="0"/>
           </a:p>
@@ -23357,7 +23399,7 @@
         </p:nvGraphicFramePr>
         <p:xfrm>
           <a:off x="411480" y="2103120"/>
-          <a:ext cx="11375136" cy="3520440"/>
+          <a:ext cx="11375136" cy="914400"/>
         </p:xfrm>
         <a:graphic>
           <a:graphicData uri="http://schemas.openxmlformats.org/drawingml/2006/table">
@@ -23680,7 +23722,7 @@
                           <a:ea typeface="Malgun Gothic" pitchFamily="34" charset="-122"/>
                           <a:cs typeface="Malgun Gothic" pitchFamily="34" charset="-120"/>
                         </a:rPr>
-                        <a:t>Log(연간매출/연평균 생활인구) − 13곳 평균</a:t>
+                        <a:t>ln(연간매출/연평균 생활인구) − 13곳 평균</a:t>
                       </a:r>
                       <a:endParaRPr lang="en-US" sz="1050" dirty="0">
                         <a:latin typeface="Malgun Gothic" charset="0"/>
@@ -23745,7 +23787,7 @@
                           <a:ea typeface="Malgun Gothic" pitchFamily="34" charset="-122"/>
                           <a:cs typeface="Malgun Gothic" pitchFamily="34" charset="-120"/>
                         </a:rPr>
-                        <a:t>음수 = 소비전환 취약</a:t>
+                        <a:t>음수 = 소비전환 취약 (e^MI = 평균 대비 배율)</a:t>
                       </a:r>
                       <a:endParaRPr lang="en-US" sz="1050" dirty="0">
                         <a:latin typeface="Malgun Gothic" charset="0"/>

--- a/eum_package/이음_발표자료_v3.pptx
+++ b/eum_package/이음_발표자료_v3.pptx
@@ -155,7 +155,7 @@
     </p:spTree>
     <p:extLst>
       <p:ext uri="{BB962C8B-B14F-4D97-AF65-F5344CB8AC3E}">
-        <p14:creationId xmlns:p14="http://schemas.microsoft.com/office/powerpoint/2010/main" val="1556677232"/>
+        <p14:creationId xmlns:p14="http://schemas.microsoft.com/office/powerpoint/2010/main" val="4238688860"/>
       </p:ext>
     </p:extLst>
   </p:cSld>
@@ -21706,7 +21706,7 @@
                 <a:ea typeface="Malgun Gothic" pitchFamily="34" charset="-122"/>
                 <a:cs typeface="Malgun Gothic" pitchFamily="34" charset="-120"/>
               </a:rPr>
-              <a:t>가설 없이 데이터를 먼저 보았다 — 두 관찰이 연구의 방향을 결정했다</a:t>
+              <a:t>가설 없이 데이터를 먼저 보았다 — 두 정보가 연구의 방향을 결정했다</a:t>
             </a:r>
             <a:endParaRPr lang="en-US" sz="1250" dirty="0"/>
           </a:p>
@@ -23377,7 +23377,7 @@
                 <a:ea typeface="Malgun Gothic" pitchFamily="34" charset="-122"/>
                 <a:cs typeface="Malgun Gothic" pitchFamily="34" charset="-120"/>
               </a:rPr>
-              <a:t>3장의 관찰을 그대로 산식으로 — ★ 생활인구 결합으로 새로 가능해진 핵심 지표</a:t>
+              <a:t>3장의 정보를 그대로 산식으로 — ★ 생활인구 결합으로 새로 가능해진 핵심 지표</a:t>
             </a:r>
             <a:endParaRPr lang="en-US" sz="1250" dirty="0"/>
           </a:p>
